--- a/sem_2_numbers/presentations/caos_2.pptx
+++ b/sem_2_numbers/presentations/caos_2.pptx
@@ -19,8 +19,9 @@
     <p:sldId id="267" r:id="rId13"/>
     <p:sldId id="268" r:id="rId14"/>
     <p:sldId id="269" r:id="rId15"/>
-    <p:sldId id="270" r:id="rId16"/>
-    <p:sldId id="271" r:id="rId17"/>
+    <p:sldId id="272" r:id="rId16"/>
+    <p:sldId id="270" r:id="rId17"/>
+    <p:sldId id="271" r:id="rId18"/>
   </p:sldIdLst>
   <p:sldSz cx="20104100" cy="11309350"/>
   <p:notesSz cx="20104100" cy="11309350"/>
@@ -246,7 +247,7 @@
             </a:lvl1pPr>
           </a:lstStyle>
           <a:p>
-            <a:endParaRPr/>
+            <a:endParaRPr dirty="0"/>
           </a:p>
         </p:txBody>
       </p:sp>
@@ -277,9 +278,9 @@
           <a:p>
             <a:fld id="{1D8BD707-D9CF-40AE-B4C6-C98DA3205C09}" type="datetimeFigureOut">
               <a:rPr lang="en-US"/>
-              <a:t>9/19/2024</a:t>
+              <a:t>9/16/2025</a:t>
             </a:fld>
-            <a:endParaRPr lang="en-US"/>
+            <a:endParaRPr lang="en-US" dirty="0"/>
           </a:p>
         </p:txBody>
       </p:sp>
@@ -311,7 +312,7 @@
             <a:fld id="{B6F15528-21DE-4FAA-801E-634DDDAF4B2B}" type="slidenum">
               <a:t>‹#›</a:t>
             </a:fld>
-            <a:endParaRPr/>
+            <a:endParaRPr dirty="0"/>
           </a:p>
         </p:txBody>
       </p:sp>
@@ -423,7 +424,7 @@
             </a:lvl1pPr>
           </a:lstStyle>
           <a:p>
-            <a:endParaRPr/>
+            <a:endParaRPr dirty="0"/>
           </a:p>
         </p:txBody>
       </p:sp>
@@ -454,9 +455,9 @@
           <a:p>
             <a:fld id="{1D8BD707-D9CF-40AE-B4C6-C98DA3205C09}" type="datetimeFigureOut">
               <a:rPr lang="en-US"/>
-              <a:t>9/19/2024</a:t>
+              <a:t>9/16/2025</a:t>
             </a:fld>
-            <a:endParaRPr lang="en-US"/>
+            <a:endParaRPr lang="en-US" dirty="0"/>
           </a:p>
         </p:txBody>
       </p:sp>
@@ -488,7 +489,7 @@
             <a:fld id="{B6F15528-21DE-4FAA-801E-634DDDAF4B2B}" type="slidenum">
               <a:t>‹#›</a:t>
             </a:fld>
-            <a:endParaRPr/>
+            <a:endParaRPr dirty="0"/>
           </a:p>
         </p:txBody>
       </p:sp>
@@ -637,7 +638,7 @@
             </a:lvl1pPr>
           </a:lstStyle>
           <a:p>
-            <a:endParaRPr/>
+            <a:endParaRPr dirty="0"/>
           </a:p>
         </p:txBody>
       </p:sp>
@@ -668,9 +669,9 @@
           <a:p>
             <a:fld id="{1D8BD707-D9CF-40AE-B4C6-C98DA3205C09}" type="datetimeFigureOut">
               <a:rPr lang="en-US"/>
-              <a:t>9/19/2024</a:t>
+              <a:t>9/16/2025</a:t>
             </a:fld>
-            <a:endParaRPr lang="en-US"/>
+            <a:endParaRPr lang="en-US" dirty="0"/>
           </a:p>
         </p:txBody>
       </p:sp>
@@ -702,7 +703,7 @@
             <a:fld id="{B6F15528-21DE-4FAA-801E-634DDDAF4B2B}" type="slidenum">
               <a:t>‹#›</a:t>
             </a:fld>
-            <a:endParaRPr/>
+            <a:endParaRPr dirty="0"/>
           </a:p>
         </p:txBody>
       </p:sp>
@@ -785,7 +786,7 @@
             </a:lvl1pPr>
           </a:lstStyle>
           <a:p>
-            <a:endParaRPr/>
+            <a:endParaRPr dirty="0"/>
           </a:p>
         </p:txBody>
       </p:sp>
@@ -816,9 +817,9 @@
           <a:p>
             <a:fld id="{1D8BD707-D9CF-40AE-B4C6-C98DA3205C09}" type="datetimeFigureOut">
               <a:rPr lang="en-US"/>
-              <a:t>9/19/2024</a:t>
+              <a:t>9/16/2025</a:t>
             </a:fld>
-            <a:endParaRPr lang="en-US"/>
+            <a:endParaRPr lang="en-US" dirty="0"/>
           </a:p>
         </p:txBody>
       </p:sp>
@@ -850,7 +851,7 @@
             <a:fld id="{B6F15528-21DE-4FAA-801E-634DDDAF4B2B}" type="slidenum">
               <a:t>‹#›</a:t>
             </a:fld>
-            <a:endParaRPr/>
+            <a:endParaRPr dirty="0"/>
           </a:p>
         </p:txBody>
       </p:sp>
@@ -904,7 +905,7 @@
             </a:lvl1pPr>
           </a:lstStyle>
           <a:p>
-            <a:endParaRPr/>
+            <a:endParaRPr dirty="0"/>
           </a:p>
         </p:txBody>
       </p:sp>
@@ -935,9 +936,9 @@
           <a:p>
             <a:fld id="{1D8BD707-D9CF-40AE-B4C6-C98DA3205C09}" type="datetimeFigureOut">
               <a:rPr lang="en-US"/>
-              <a:t>9/19/2024</a:t>
+              <a:t>9/16/2025</a:t>
             </a:fld>
-            <a:endParaRPr lang="en-US"/>
+            <a:endParaRPr lang="en-US" dirty="0"/>
           </a:p>
         </p:txBody>
       </p:sp>
@@ -969,7 +970,7 @@
             <a:fld id="{B6F15528-21DE-4FAA-801E-634DDDAF4B2B}" type="slidenum">
               <a:t>‹#›</a:t>
             </a:fld>
-            <a:endParaRPr/>
+            <a:endParaRPr dirty="0"/>
           </a:p>
         </p:txBody>
       </p:sp>
@@ -1119,7 +1120,7 @@
             </a:lvl1pPr>
           </a:lstStyle>
           <a:p>
-            <a:endParaRPr/>
+            <a:endParaRPr dirty="0"/>
           </a:p>
         </p:txBody>
       </p:sp>
@@ -1160,9 +1161,9 @@
           <a:p>
             <a:fld id="{1D8BD707-D9CF-40AE-B4C6-C98DA3205C09}" type="datetimeFigureOut">
               <a:rPr lang="en-US"/>
-              <a:t>9/19/2024</a:t>
+              <a:t>9/16/2025</a:t>
             </a:fld>
-            <a:endParaRPr lang="en-US"/>
+            <a:endParaRPr lang="en-US" dirty="0"/>
           </a:p>
         </p:txBody>
       </p:sp>
@@ -1204,7 +1205,7 @@
             <a:fld id="{B6F15528-21DE-4FAA-801E-634DDDAF4B2B}" type="slidenum">
               <a:t>‹#›</a:t>
             </a:fld>
-            <a:endParaRPr/>
+            <a:endParaRPr dirty="0"/>
           </a:p>
         </p:txBody>
       </p:sp>
@@ -1379,28 +1380,6 @@
           <a:chExt cx="0" cy="0"/>
         </a:xfrm>
       </p:grpSpPr>
-      <p:pic>
-        <p:nvPicPr>
-          <p:cNvPr id="2" name="object 2"/>
-          <p:cNvPicPr/>
-          <p:nvPr/>
-        </p:nvPicPr>
-        <p:blipFill>
-          <a:blip r:embed="rId2" cstate="print"/>
-          <a:stretch>
-            <a:fillRect/>
-          </a:stretch>
-        </p:blipFill>
-        <p:spPr>
-          <a:xfrm>
-            <a:off x="8342895" y="1744428"/>
-            <a:ext cx="3396370" cy="915711"/>
-          </a:xfrm>
-          <a:prstGeom prst="rect">
-            <a:avLst/>
-          </a:prstGeom>
-        </p:spPr>
-      </p:pic>
       <p:sp>
         <p:nvSpPr>
           <p:cNvPr id="3" name="object 3"/>
@@ -1469,6 +1448,41 @@
               <a:t>данных</a:t>
             </a:r>
             <a:endParaRPr sz="5250" dirty="0"/>
+          </a:p>
+        </p:txBody>
+      </p:sp>
+      <p:sp>
+        <p:nvSpPr>
+          <p:cNvPr id="4" name="TextBox 3">
+            <a:extLst>
+              <a:ext uri="{FF2B5EF4-FFF2-40B4-BE49-F238E27FC236}">
+                <a16:creationId xmlns:a16="http://schemas.microsoft.com/office/drawing/2014/main" id="{E6627406-1BE6-4F83-915A-7F9B2E00E460}"/>
+              </a:ext>
+            </a:extLst>
+          </p:cNvPr>
+          <p:cNvSpPr txBox="1"/>
+          <p:nvPr/>
+        </p:nvSpPr>
+        <p:spPr>
+          <a:xfrm>
+            <a:off x="8428829" y="930275"/>
+            <a:ext cx="3246119" cy="1569660"/>
+          </a:xfrm>
+          <a:prstGeom prst="rect">
+            <a:avLst/>
+          </a:prstGeom>
+          <a:noFill/>
+        </p:spPr>
+        <p:txBody>
+          <a:bodyPr wrap="square" rtlCol="0">
+            <a:spAutoFit/>
+          </a:bodyPr>
+          <a:lstStyle/>
+          <a:p>
+            <a:r>
+              <a:rPr lang="ru-RU" sz="9600" b="1" dirty="0"/>
+              <a:t>АКОС</a:t>
+            </a:r>
           </a:p>
         </p:txBody>
       </p:sp>
@@ -1562,7 +1576,7 @@
         <p:spPr>
           <a:xfrm>
             <a:off x="1076272" y="3278513"/>
-            <a:ext cx="7950200" cy="3756156"/>
+            <a:ext cx="7950200" cy="5638723"/>
           </a:xfrm>
           <a:prstGeom prst="rect">
             <a:avLst/>
@@ -2104,6 +2118,80 @@
                 <a:hlinkClick r:id="rId5"/>
               </a:rPr>
               <a:t>Pentium FDIV bug</a:t>
+            </a:r>
+            <a:endParaRPr lang="en-US" sz="3950" u="heavy" spc="-175" dirty="0">
+              <a:uFill>
+                <a:solidFill>
+                  <a:srgbClr val="000000"/>
+                </a:solidFill>
+              </a:uFill>
+              <a:latin typeface="Arial" panose="020B0604020202020204" pitchFamily="34" charset="0"/>
+              <a:cs typeface="Arial" panose="020B0604020202020204" pitchFamily="34" charset="0"/>
+            </a:endParaRPr>
+          </a:p>
+          <a:p>
+            <a:pPr marL="473075" indent="-461009">
+              <a:lnSpc>
+                <a:spcPct val="100000"/>
+              </a:lnSpc>
+              <a:spcBef>
+                <a:spcPts val="2555"/>
+              </a:spcBef>
+              <a:buChar char="•"/>
+              <a:tabLst>
+                <a:tab pos="473075" algn="l"/>
+                <a:tab pos="473709" algn="l"/>
+              </a:tabLst>
+            </a:pPr>
+            <a:r>
+              <a:rPr lang="ru-RU" sz="3950" u="heavy" spc="-175" dirty="0">
+                <a:uFill>
+                  <a:solidFill>
+                    <a:srgbClr val="000000"/>
+                  </a:solidFill>
+                </a:uFill>
+                <a:latin typeface="Arial" panose="020B0604020202020204" pitchFamily="34" charset="0"/>
+                <a:cs typeface="Arial" panose="020B0604020202020204" pitchFamily="34" charset="0"/>
+                <a:hlinkClick r:id="rId6"/>
+              </a:rPr>
+              <a:t>Арифметика</a:t>
+            </a:r>
+            <a:endParaRPr lang="en-US" sz="3950" u="heavy" spc="-175" dirty="0">
+              <a:uFill>
+                <a:solidFill>
+                  <a:srgbClr val="000000"/>
+                </a:solidFill>
+              </a:uFill>
+              <a:latin typeface="Arial" panose="020B0604020202020204" pitchFamily="34" charset="0"/>
+              <a:cs typeface="Arial" panose="020B0604020202020204" pitchFamily="34" charset="0"/>
+            </a:endParaRPr>
+          </a:p>
+          <a:p>
+            <a:pPr marL="473075" indent="-461009">
+              <a:lnSpc>
+                <a:spcPct val="100000"/>
+              </a:lnSpc>
+              <a:spcBef>
+                <a:spcPts val="2555"/>
+              </a:spcBef>
+              <a:buChar char="•"/>
+              <a:tabLst>
+                <a:tab pos="473075" algn="l"/>
+                <a:tab pos="473709" algn="l"/>
+              </a:tabLst>
+            </a:pPr>
+            <a:r>
+              <a:rPr lang="ru-RU" sz="3950" u="heavy" spc="-175" dirty="0">
+                <a:uFill>
+                  <a:solidFill>
+                    <a:srgbClr val="000000"/>
+                  </a:solidFill>
+                </a:uFill>
+                <a:latin typeface="Arial" panose="020B0604020202020204" pitchFamily="34" charset="0"/>
+                <a:cs typeface="Arial" panose="020B0604020202020204" pitchFamily="34" charset="0"/>
+                <a:hlinkClick r:id="rId7"/>
+              </a:rPr>
+              <a:t>Про другие размеры флотов</a:t>
             </a:r>
             <a:endParaRPr sz="3950" dirty="0">
               <a:latin typeface="Arial" panose="020B0604020202020204" pitchFamily="34" charset="0"/>
@@ -2403,6 +2491,10 @@
           </p:nvPr>
         </p:nvSpPr>
         <p:spPr>
+          <a:xfrm>
+            <a:off x="8338078" y="396875"/>
+            <a:ext cx="3427943" cy="1081405"/>
+          </a:xfrm>
           <a:prstGeom prst="rect">
             <a:avLst/>
           </a:prstGeom>
@@ -2449,6 +2541,123 @@
               <a:rPr spc="225" dirty="0"/>
               <a:t>e</a:t>
             </a:r>
+          </a:p>
+        </p:txBody>
+      </p:sp>
+      <p:pic>
+        <p:nvPicPr>
+          <p:cNvPr id="1026" name="Picture 2" descr="Picture background">
+            <a:extLst>
+              <a:ext uri="{FF2B5EF4-FFF2-40B4-BE49-F238E27FC236}">
+                <a16:creationId xmlns:a16="http://schemas.microsoft.com/office/drawing/2014/main" id="{00B9B436-CF3A-4468-958A-5C57F65144D3}"/>
+              </a:ext>
+            </a:extLst>
+          </p:cNvPr>
+          <p:cNvPicPr>
+            <a:picLocks noChangeAspect="1" noChangeArrowheads="1"/>
+          </p:cNvPicPr>
+          <p:nvPr/>
+        </p:nvPicPr>
+        <p:blipFill>
+          <a:blip r:embed="rId2">
+            <a:extLst>
+              <a:ext uri="{28A0092B-C50C-407E-A947-70E740481C1C}">
+                <a14:useLocalDpi xmlns:a14="http://schemas.microsoft.com/office/drawing/2010/main" val="0"/>
+              </a:ext>
+            </a:extLst>
+          </a:blip>
+          <a:srcRect/>
+          <a:stretch>
+            <a:fillRect/>
+          </a:stretch>
+        </p:blipFill>
+        <p:spPr bwMode="auto">
+          <a:xfrm>
+            <a:off x="3155949" y="1768475"/>
+            <a:ext cx="13792200" cy="8679716"/>
+          </a:xfrm>
+          <a:prstGeom prst="rect">
+            <a:avLst/>
+          </a:prstGeom>
+          <a:noFill/>
+          <a:extLst>
+            <a:ext uri="{909E8E84-426E-40DD-AFC4-6F175D3DCCD1}">
+              <a14:hiddenFill xmlns:a14="http://schemas.microsoft.com/office/drawing/2010/main">
+                <a:solidFill>
+                  <a:srgbClr val="FFFFFF"/>
+                </a:solidFill>
+              </a14:hiddenFill>
+            </a:ext>
+          </a:extLst>
+        </p:spPr>
+      </p:pic>
+    </p:spTree>
+  </p:cSld>
+  <p:clrMapOvr>
+    <a:masterClrMapping/>
+  </p:clrMapOvr>
+</p:sld>
+</file>
+
+<file path=ppt/slides/slide15.xml><?xml version="1.0" encoding="utf-8"?>
+<p:sld xmlns:a="http://schemas.openxmlformats.org/drawingml/2006/main" xmlns:r="http://schemas.openxmlformats.org/officeDocument/2006/relationships" xmlns:p="http://schemas.openxmlformats.org/presentationml/2006/main">
+  <p:cSld>
+    <p:spTree>
+      <p:nvGrpSpPr>
+        <p:cNvPr id="1" name=""/>
+        <p:cNvGrpSpPr/>
+        <p:nvPr/>
+      </p:nvGrpSpPr>
+      <p:grpSpPr>
+        <a:xfrm>
+          <a:off x="0" y="0"/>
+          <a:ext cx="0" cy="0"/>
+          <a:chOff x="0" y="0"/>
+          <a:chExt cx="0" cy="0"/>
+        </a:xfrm>
+      </p:grpSpPr>
+      <p:sp>
+        <p:nvSpPr>
+          <p:cNvPr id="2" name="object 2"/>
+          <p:cNvSpPr txBox="1">
+            <a:spLocks noGrp="1"/>
+          </p:cNvSpPr>
+          <p:nvPr>
+            <p:ph type="title"/>
+          </p:nvPr>
+        </p:nvSpPr>
+        <p:spPr>
+          <a:xfrm>
+            <a:off x="8772217" y="701675"/>
+            <a:ext cx="2552172" cy="1081405"/>
+          </a:xfrm>
+          <a:prstGeom prst="rect">
+            <a:avLst/>
+          </a:prstGeom>
+        </p:spPr>
+        <p:txBody>
+          <a:bodyPr vert="horz" wrap="square" lIns="0" tIns="15875" rIns="0" bIns="0" rtlCol="0">
+            <a:spAutoFit/>
+          </a:bodyPr>
+          <a:lstStyle/>
+          <a:p>
+            <a:pPr marL="12700">
+              <a:lnSpc>
+                <a:spcPct val="100000"/>
+              </a:lnSpc>
+              <a:spcBef>
+                <a:spcPts val="125"/>
+              </a:spcBef>
+            </a:pPr>
+            <a:r>
+              <a:rPr spc="-150" dirty="0"/>
+              <a:t>U</a:t>
+            </a:r>
+            <a:r>
+              <a:rPr lang="en-US" spc="-130" dirty="0"/>
+              <a:t>TF-8</a:t>
+            </a:r>
+            <a:endParaRPr spc="225" dirty="0"/>
           </a:p>
         </p:txBody>
       </p:sp>
@@ -2475,6 +2684,11 @@
         </p:spPr>
       </p:pic>
     </p:spTree>
+    <p:extLst>
+      <p:ext uri="{BB962C8B-B14F-4D97-AF65-F5344CB8AC3E}">
+        <p14:creationId xmlns:p14="http://schemas.microsoft.com/office/powerpoint/2010/main" val="3196993959"/>
+      </p:ext>
+    </p:extLst>
   </p:cSld>
   <p:clrMapOvr>
     <a:masterClrMapping/>
@@ -2482,7 +2696,7 @@
 </p:sld>
 </file>
 
-<file path=ppt/slides/slide15.xml><?xml version="1.0" encoding="utf-8"?>
+<file path=ppt/slides/slide16.xml><?xml version="1.0" encoding="utf-8"?>
 <p:sld xmlns:a="http://schemas.openxmlformats.org/drawingml/2006/main" xmlns:r="http://schemas.openxmlformats.org/officeDocument/2006/relationships" xmlns:p="http://schemas.openxmlformats.org/presentationml/2006/main" showMasterSp="0">
   <p:cSld>
     <p:spTree>
@@ -2593,7 +2807,7 @@
 </p:sld>
 </file>
 
-<file path=ppt/slides/slide16.xml><?xml version="1.0" encoding="utf-8"?>
+<file path=ppt/slides/slide17.xml><?xml version="1.0" encoding="utf-8"?>
 <p:sld xmlns:a="http://schemas.openxmlformats.org/drawingml/2006/main" xmlns:r="http://schemas.openxmlformats.org/officeDocument/2006/relationships" xmlns:p="http://schemas.openxmlformats.org/presentationml/2006/main" showMasterSp="0">
   <p:cSld>
     <p:spTree>
@@ -7061,8 +7275,8 @@
         </p:nvSpPr>
         <p:spPr>
           <a:xfrm>
-            <a:off x="1191451" y="3531704"/>
-            <a:ext cx="4594860" cy="3166745"/>
+            <a:off x="1191450" y="3531704"/>
+            <a:ext cx="16632999" cy="4431983"/>
           </a:xfrm>
           <a:prstGeom prst="rect">
             <a:avLst/>
@@ -7288,7 +7502,99 @@
               </a:rPr>
               <a:t>calculation</a:t>
             </a:r>
-            <a:endParaRPr sz="4100" dirty="0">
+            <a:endParaRPr lang="en-US" sz="4100" dirty="0">
+              <a:solidFill>
+                <a:srgbClr val="161616"/>
+              </a:solidFill>
+              <a:latin typeface="Microsoft Sans Serif"/>
+              <a:cs typeface="Microsoft Sans Serif"/>
+            </a:endParaRPr>
+          </a:p>
+          <a:p>
+            <a:pPr marL="274320" indent="-262255">
+              <a:lnSpc>
+                <a:spcPct val="100000"/>
+              </a:lnSpc>
+              <a:spcBef>
+                <a:spcPts val="30"/>
+              </a:spcBef>
+              <a:buChar char="•"/>
+              <a:tabLst>
+                <a:tab pos="274955" algn="l"/>
+              </a:tabLst>
+            </a:pPr>
+            <a:endParaRPr lang="en-US" sz="4100" dirty="0">
+              <a:solidFill>
+                <a:srgbClr val="161616"/>
+              </a:solidFill>
+              <a:latin typeface="Microsoft Sans Serif"/>
+              <a:cs typeface="Microsoft Sans Serif"/>
+            </a:endParaRPr>
+          </a:p>
+          <a:p>
+            <a:pPr marL="274320" indent="-262255">
+              <a:lnSpc>
+                <a:spcPct val="100000"/>
+              </a:lnSpc>
+              <a:spcBef>
+                <a:spcPts val="30"/>
+              </a:spcBef>
+              <a:buChar char="•"/>
+              <a:tabLst>
+                <a:tab pos="274955" algn="l"/>
+              </a:tabLst>
+            </a:pPr>
+            <a:r>
+              <a:rPr lang="ru-RU" sz="4100" dirty="0">
+                <a:solidFill>
+                  <a:srgbClr val="161616"/>
+                </a:solidFill>
+                <a:latin typeface="Microsoft Sans Serif"/>
+                <a:cs typeface="Microsoft Sans Serif"/>
+              </a:rPr>
+              <a:t>По умолчанию они “выключены”, см. </a:t>
+            </a:r>
+            <a:r>
+              <a:rPr lang="en-US" sz="4100" dirty="0">
+                <a:solidFill>
+                  <a:srgbClr val="161616"/>
+                </a:solidFill>
+                <a:latin typeface="Microsoft Sans Serif"/>
+                <a:cs typeface="Microsoft Sans Serif"/>
+              </a:rPr>
+              <a:t>m</a:t>
+            </a:r>
+            <a:r>
+              <a:rPr lang="ru-RU" sz="4100" dirty="0" err="1">
+                <a:solidFill>
+                  <a:srgbClr val="161616"/>
+                </a:solidFill>
+                <a:latin typeface="Microsoft Sans Serif"/>
+                <a:cs typeface="Microsoft Sans Serif"/>
+              </a:rPr>
+              <a:t>an</a:t>
+            </a:r>
+            <a:r>
+              <a:rPr lang="ru-RU" sz="4100" dirty="0">
+                <a:solidFill>
+                  <a:srgbClr val="161616"/>
+                </a:solidFill>
+                <a:latin typeface="Microsoft Sans Serif"/>
+                <a:cs typeface="Microsoft Sans Serif"/>
+              </a:rPr>
+              <a:t> </a:t>
+            </a:r>
+            <a:r>
+              <a:rPr lang="en-US" sz="4100" dirty="0" err="1">
+                <a:solidFill>
+                  <a:srgbClr val="161616"/>
+                </a:solidFill>
+                <a:latin typeface="Microsoft Sans Serif"/>
+                <a:cs typeface="Microsoft Sans Serif"/>
+              </a:rPr>
+              <a:t>feenableexcept</a:t>
+            </a:r>
+            <a:endParaRPr lang="ru-RU" sz="4100" dirty="0">
               <a:latin typeface="Microsoft Sans Serif"/>
               <a:cs typeface="Microsoft Sans Serif"/>
             </a:endParaRPr>
